--- a/boards/off-robot/battery-status-v2.0/Battery Status Device Design Review.pptx
+++ b/boards/off-robot/battery-status-v2.0/Battery Status Device Design Review.pptx
@@ -28359,7 +28359,7 @@
         </p:nvSpPr>
         <p:spPr>
           <a:xfrm>
-            <a:off x="691078" y="722904"/>
+            <a:off x="460072" y="818343"/>
             <a:ext cx="10501177" cy="1009644"/>
           </a:xfrm>
         </p:spPr>
@@ -28368,13 +28368,7 @@
           <a:lstStyle/>
           <a:p>
             <a:r>
-              <a:rPr lang="en-US" dirty="0">
-                <a:solidFill>
-                  <a:schemeClr val="bg1">
-                    <a:lumMod val="50000"/>
-                  </a:schemeClr>
-                </a:solidFill>
-              </a:rPr>
+              <a:rPr lang="en-US" dirty="0"/>
               <a:t>Microcontroller</a:t>
             </a:r>
           </a:p>
@@ -28587,6 +28581,212 @@
           </p:grpSp>
         </p:grpSp>
       </p:grpSp>
+      <p:sp>
+        <p:nvSpPr>
+          <p:cNvPr id="15" name="TextBox 14">
+            <a:extLst>
+              <a:ext uri="{FF2B5EF4-FFF2-40B4-BE49-F238E27FC236}">
+                <a16:creationId xmlns:a16="http://schemas.microsoft.com/office/drawing/2014/main" id="{D9A3844D-EC75-4818-977C-29DD4CA3BC32}"/>
+              </a:ext>
+            </a:extLst>
+          </p:cNvPr>
+          <p:cNvSpPr txBox="1"/>
+          <p:nvPr/>
+        </p:nvSpPr>
+        <p:spPr>
+          <a:xfrm>
+            <a:off x="630838" y="2118565"/>
+            <a:ext cx="3773216" cy="4113947"/>
+          </a:xfrm>
+          <a:prstGeom prst="rect">
+            <a:avLst/>
+          </a:prstGeom>
+          <a:noFill/>
+        </p:spPr>
+        <p:txBody>
+          <a:bodyPr wrap="square" rtlCol="0">
+            <a:spAutoFit/>
+          </a:bodyPr>
+          <a:lstStyle/>
+          <a:p>
+            <a:pPr>
+              <a:spcBef>
+                <a:spcPts val="100"/>
+              </a:spcBef>
+              <a:spcAft>
+                <a:spcPts val="100"/>
+              </a:spcAft>
+            </a:pPr>
+            <a:r>
+              <a:rPr lang="en-US" sz="2400" dirty="0">
+                <a:solidFill>
+                  <a:schemeClr val="tx1">
+                    <a:lumMod val="50000"/>
+                    <a:lumOff val="50000"/>
+                  </a:schemeClr>
+                </a:solidFill>
+              </a:rPr>
+              <a:t>Pins 1–4, 9, 15-17, 21-25, and 30-32 for digital display</a:t>
+            </a:r>
+          </a:p>
+          <a:p>
+            <a:pPr>
+              <a:spcBef>
+                <a:spcPts val="100"/>
+              </a:spcBef>
+              <a:spcAft>
+                <a:spcPts val="100"/>
+              </a:spcAft>
+            </a:pPr>
+            <a:endParaRPr lang="en-US" sz="800" dirty="0">
+              <a:solidFill>
+                <a:schemeClr val="tx1">
+                  <a:lumMod val="50000"/>
+                  <a:lumOff val="50000"/>
+                </a:schemeClr>
+              </a:solidFill>
+            </a:endParaRPr>
+          </a:p>
+          <a:p>
+            <a:pPr>
+              <a:spcBef>
+                <a:spcPts val="100"/>
+              </a:spcBef>
+              <a:spcAft>
+                <a:spcPts val="100"/>
+              </a:spcAft>
+            </a:pPr>
+            <a:r>
+              <a:rPr lang="en-US" sz="2400" dirty="0">
+                <a:solidFill>
+                  <a:schemeClr val="tx1">
+                    <a:lumMod val="50000"/>
+                    <a:lumOff val="50000"/>
+                  </a:schemeClr>
+                </a:solidFill>
+              </a:rPr>
+              <a:t>Pins 6–8, 26 for programming</a:t>
+            </a:r>
+          </a:p>
+          <a:p>
+            <a:pPr>
+              <a:spcBef>
+                <a:spcPts val="100"/>
+              </a:spcBef>
+              <a:spcAft>
+                <a:spcPts val="100"/>
+              </a:spcAft>
+            </a:pPr>
+            <a:endParaRPr lang="en-US" sz="800" dirty="0">
+              <a:solidFill>
+                <a:schemeClr val="tx1">
+                  <a:lumMod val="50000"/>
+                  <a:lumOff val="50000"/>
+                </a:schemeClr>
+              </a:solidFill>
+            </a:endParaRPr>
+          </a:p>
+          <a:p>
+            <a:pPr>
+              <a:spcBef>
+                <a:spcPts val="100"/>
+              </a:spcBef>
+              <a:spcAft>
+                <a:spcPts val="100"/>
+              </a:spcAft>
+            </a:pPr>
+            <a:r>
+              <a:rPr lang="en-US" sz="2400" dirty="0">
+                <a:solidFill>
+                  <a:schemeClr val="tx1">
+                    <a:lumMod val="50000"/>
+                    <a:lumOff val="50000"/>
+                  </a:schemeClr>
+                </a:solidFill>
+              </a:rPr>
+              <a:t>Pins 10-14 for analog input from voltage divider</a:t>
+            </a:r>
+          </a:p>
+          <a:p>
+            <a:pPr>
+              <a:spcBef>
+                <a:spcPts val="100"/>
+              </a:spcBef>
+              <a:spcAft>
+                <a:spcPts val="100"/>
+              </a:spcAft>
+            </a:pPr>
+            <a:endParaRPr lang="en-US" sz="800" dirty="0">
+              <a:solidFill>
+                <a:schemeClr val="tx1">
+                  <a:lumMod val="50000"/>
+                  <a:lumOff val="50000"/>
+                </a:schemeClr>
+              </a:solidFill>
+            </a:endParaRPr>
+          </a:p>
+          <a:p>
+            <a:pPr>
+              <a:spcBef>
+                <a:spcPts val="100"/>
+              </a:spcBef>
+              <a:spcAft>
+                <a:spcPts val="100"/>
+              </a:spcAft>
+            </a:pPr>
+            <a:r>
+              <a:rPr lang="en-US" sz="2400" dirty="0">
+                <a:solidFill>
+                  <a:schemeClr val="tx1">
+                    <a:lumMod val="50000"/>
+                    <a:lumOff val="50000"/>
+                  </a:schemeClr>
+                </a:solidFill>
+              </a:rPr>
+              <a:t>Pins 19 and 29 for ground</a:t>
+            </a:r>
+          </a:p>
+          <a:p>
+            <a:pPr>
+              <a:spcBef>
+                <a:spcPts val="100"/>
+              </a:spcBef>
+              <a:spcAft>
+                <a:spcPts val="100"/>
+              </a:spcAft>
+            </a:pPr>
+            <a:endParaRPr lang="en-US" sz="800" dirty="0">
+              <a:solidFill>
+                <a:schemeClr val="tx1">
+                  <a:lumMod val="50000"/>
+                  <a:lumOff val="50000"/>
+                </a:schemeClr>
+              </a:solidFill>
+            </a:endParaRPr>
+          </a:p>
+          <a:p>
+            <a:pPr>
+              <a:spcBef>
+                <a:spcPts val="100"/>
+              </a:spcBef>
+              <a:spcAft>
+                <a:spcPts val="100"/>
+              </a:spcAft>
+            </a:pPr>
+            <a:r>
+              <a:rPr lang="en-US" sz="2400" dirty="0">
+                <a:solidFill>
+                  <a:schemeClr val="tx1">
+                    <a:lumMod val="50000"/>
+                    <a:lumOff val="50000"/>
+                  </a:schemeClr>
+                </a:solidFill>
+              </a:rPr>
+              <a:t>Pins 18 and 28 for 3.3V</a:t>
+            </a:r>
+          </a:p>
+        </p:txBody>
+      </p:sp>
     </p:spTree>
     <p:extLst>
       <p:ext uri="{BB962C8B-B14F-4D97-AF65-F5344CB8AC3E}">

--- a/boards/off-robot/battery-status-v2.0/Battery Status Device Design Review.pptx
+++ b/boards/off-robot/battery-status-v2.0/Battery Status Device Design Review.pptx
@@ -19,6 +19,7 @@
     <p:sldId id="266" r:id="rId13"/>
     <p:sldId id="260" r:id="rId14"/>
     <p:sldId id="268" r:id="rId15"/>
+    <p:sldId id="271" r:id="rId16"/>
   </p:sldIdLst>
   <p:sldSz cx="12192000" cy="6858000"/>
   <p:notesSz cx="6858000" cy="9144000"/>
@@ -117,6 +118,11 @@
       </a:defRPr>
     </a:lvl9pPr>
   </p:defaultTextStyle>
+  <p:extLst>
+    <p:ext uri="{EFAFB233-063F-42B5-8137-9DF3F51BA10A}">
+      <p15:sldGuideLst xmlns:p15="http://schemas.microsoft.com/office/powerpoint/2012/main"/>
+    </p:ext>
+  </p:extLst>
 </p:presentation>
 </file>
 
@@ -5056,7 +5062,7 @@
           <a:p>
             <a:fld id="{8F72BA41-EC5B-4197-BCC8-0FD2E523CD7A}" type="datetimeFigureOut">
               <a:rPr lang="en-US" smtClean="0"/>
-              <a:t>1/18/2022</a:t>
+              <a:t>1/23/2022</a:t>
             </a:fld>
             <a:endParaRPr lang="en-US"/>
           </a:p>
@@ -5259,7 +5265,7 @@
           <a:p>
             <a:fld id="{8F72BA41-EC5B-4197-BCC8-0FD2E523CD7A}" type="datetimeFigureOut">
               <a:rPr lang="en-US" smtClean="0"/>
-              <a:t>1/18/2022</a:t>
+              <a:t>1/23/2022</a:t>
             </a:fld>
             <a:endParaRPr lang="en-US"/>
           </a:p>
@@ -6980,7 +6986,7 @@
           <a:p>
             <a:fld id="{8F72BA41-EC5B-4197-BCC8-0FD2E523CD7A}" type="datetimeFigureOut">
               <a:rPr lang="en-US" smtClean="0"/>
-              <a:t>1/18/2022</a:t>
+              <a:t>1/23/2022</a:t>
             </a:fld>
             <a:endParaRPr lang="en-US"/>
           </a:p>
@@ -7179,7 +7185,7 @@
           <a:p>
             <a:fld id="{8F72BA41-EC5B-4197-BCC8-0FD2E523CD7A}" type="datetimeFigureOut">
               <a:rPr lang="en-US" smtClean="0"/>
-              <a:t>1/18/2022</a:t>
+              <a:t>1/23/2022</a:t>
             </a:fld>
             <a:endParaRPr lang="en-US"/>
           </a:p>
@@ -8969,7 +8975,7 @@
           <a:p>
             <a:fld id="{8F72BA41-EC5B-4197-BCC8-0FD2E523CD7A}" type="datetimeFigureOut">
               <a:rPr lang="en-US" smtClean="0"/>
-              <a:t>1/18/2022</a:t>
+              <a:t>1/23/2022</a:t>
             </a:fld>
             <a:endParaRPr lang="en-US"/>
           </a:p>
@@ -9242,7 +9248,7 @@
           <a:p>
             <a:fld id="{8F72BA41-EC5B-4197-BCC8-0FD2E523CD7A}" type="datetimeFigureOut">
               <a:rPr lang="en-US" smtClean="0"/>
-              <a:t>1/18/2022</a:t>
+              <a:t>1/23/2022</a:t>
             </a:fld>
             <a:endParaRPr lang="en-US"/>
           </a:p>
@@ -9662,7 +9668,7 @@
           <a:p>
             <a:fld id="{8F72BA41-EC5B-4197-BCC8-0FD2E523CD7A}" type="datetimeFigureOut">
               <a:rPr lang="en-US" smtClean="0"/>
-              <a:t>1/18/2022</a:t>
+              <a:t>1/23/2022</a:t>
             </a:fld>
             <a:endParaRPr lang="en-US"/>
           </a:p>
@@ -9818,7 +9824,7 @@
           <a:p>
             <a:fld id="{8F72BA41-EC5B-4197-BCC8-0FD2E523CD7A}" type="datetimeFigureOut">
               <a:rPr lang="en-US" smtClean="0"/>
-              <a:t>1/18/2022</a:t>
+              <a:t>1/23/2022</a:t>
             </a:fld>
             <a:endParaRPr lang="en-US"/>
           </a:p>
@@ -11386,7 +11392,7 @@
           <a:p>
             <a:fld id="{8F72BA41-EC5B-4197-BCC8-0FD2E523CD7A}" type="datetimeFigureOut">
               <a:rPr lang="en-US" smtClean="0"/>
-              <a:t>1/18/2022</a:t>
+              <a:t>1/23/2022</a:t>
             </a:fld>
             <a:endParaRPr lang="en-US"/>
           </a:p>
@@ -13237,7 +13243,7 @@
           <a:p>
             <a:fld id="{8F72BA41-EC5B-4197-BCC8-0FD2E523CD7A}" type="datetimeFigureOut">
               <a:rPr lang="en-US" smtClean="0"/>
-              <a:t>1/18/2022</a:t>
+              <a:t>1/23/2022</a:t>
             </a:fld>
             <a:endParaRPr lang="en-US"/>
           </a:p>
@@ -15050,7 +15056,7 @@
           <a:p>
             <a:fld id="{8F72BA41-EC5B-4197-BCC8-0FD2E523CD7A}" type="datetimeFigureOut">
               <a:rPr lang="en-US" smtClean="0"/>
-              <a:t>1/18/2022</a:t>
+              <a:t>1/23/2022</a:t>
             </a:fld>
             <a:endParaRPr lang="en-US"/>
           </a:p>
@@ -16744,7 +16750,7 @@
             <a:fld id="{8F72BA41-EC5B-4197-BCC8-0FD2E523CD7A}" type="datetimeFigureOut">
               <a:rPr lang="en-US" smtClean="0"/>
               <a:pPr/>
-              <a:t>1/18/2022</a:t>
+              <a:t>1/23/2022</a:t>
             </a:fld>
             <a:endParaRPr lang="en-US" dirty="0"/>
           </a:p>
@@ -20236,22 +20242,217 @@
             <p:ph type="title"/>
           </p:nvPr>
         </p:nvSpPr>
-        <p:spPr/>
+        <p:spPr>
+          <a:xfrm>
+            <a:off x="680918" y="1159783"/>
+            <a:ext cx="10501177" cy="1401231"/>
+          </a:xfrm>
+        </p:spPr>
         <p:txBody>
-          <a:bodyPr/>
+          <a:bodyPr>
+            <a:noAutofit/>
+          </a:bodyPr>
           <a:lstStyle/>
           <a:p>
             <a:r>
-              <a:rPr lang="en-US" dirty="0"/>
-              <a:t>Routing (PCB)</a:t>
+              <a:rPr lang="en-US" sz="4800" dirty="0">
+                <a:solidFill>
+                  <a:schemeClr val="bg1">
+                    <a:lumMod val="50000"/>
+                  </a:schemeClr>
+                </a:solidFill>
+              </a:rPr>
+              <a:t>Routing</a:t>
+            </a:r>
+            <a:br>
+              <a:rPr lang="en-US" sz="4800" dirty="0">
+                <a:solidFill>
+                  <a:schemeClr val="bg1">
+                    <a:lumMod val="50000"/>
+                  </a:schemeClr>
+                </a:solidFill>
+              </a:rPr>
+            </a:br>
+            <a:r>
+              <a:rPr lang="en-US" sz="4800" dirty="0">
+                <a:solidFill>
+                  <a:schemeClr val="bg1">
+                    <a:lumMod val="50000"/>
+                  </a:schemeClr>
+                </a:solidFill>
+              </a:rPr>
+              <a:t>(PCB)</a:t>
             </a:r>
           </a:p>
         </p:txBody>
       </p:sp>
+      <p:pic>
+        <p:nvPicPr>
+          <p:cNvPr id="6" name="Picture 5" descr="A screenshot of a computer&#10;&#10;Description automatically generated with medium confidence">
+            <a:extLst>
+              <a:ext uri="{FF2B5EF4-FFF2-40B4-BE49-F238E27FC236}">
+                <a16:creationId xmlns:a16="http://schemas.microsoft.com/office/drawing/2014/main" id="{00ACC6D9-ED27-4A44-9076-E176CD9B9D30}"/>
+              </a:ext>
+            </a:extLst>
+          </p:cNvPr>
+          <p:cNvPicPr>
+            <a:picLocks noChangeAspect="1"/>
+          </p:cNvPicPr>
+          <p:nvPr/>
+        </p:nvPicPr>
+        <p:blipFill>
+          <a:blip r:embed="rId2">
+            <a:extLst>
+              <a:ext uri="{28A0092B-C50C-407E-A947-70E740481C1C}">
+                <a14:useLocalDpi xmlns:a14="http://schemas.microsoft.com/office/drawing/2010/main" val="0"/>
+              </a:ext>
+            </a:extLst>
+          </a:blip>
+          <a:stretch>
+            <a:fillRect/>
+          </a:stretch>
+        </p:blipFill>
+        <p:spPr>
+          <a:xfrm>
+            <a:off x="3241040" y="248873"/>
+            <a:ext cx="9540380" cy="6360253"/>
+          </a:xfrm>
+          <a:prstGeom prst="rect">
+            <a:avLst/>
+          </a:prstGeom>
+        </p:spPr>
+      </p:pic>
     </p:spTree>
     <p:extLst>
       <p:ext uri="{BB962C8B-B14F-4D97-AF65-F5344CB8AC3E}">
         <p14:creationId xmlns:p14="http://schemas.microsoft.com/office/powerpoint/2010/main" val="953023119"/>
+      </p:ext>
+    </p:extLst>
+  </p:cSld>
+  <p:clrMapOvr>
+    <a:masterClrMapping/>
+  </p:clrMapOvr>
+</p:sld>
+</file>
+
+<file path=ppt/slides/slide15.xml><?xml version="1.0" encoding="utf-8"?>
+<p:sld xmlns:a="http://schemas.openxmlformats.org/drawingml/2006/main" xmlns:r="http://schemas.openxmlformats.org/officeDocument/2006/relationships" xmlns:p="http://schemas.openxmlformats.org/presentationml/2006/main">
+  <p:cSld>
+    <p:spTree>
+      <p:nvGrpSpPr>
+        <p:cNvPr id="1" name=""/>
+        <p:cNvGrpSpPr/>
+        <p:nvPr/>
+      </p:nvGrpSpPr>
+      <p:grpSpPr>
+        <a:xfrm>
+          <a:off x="0" y="0"/>
+          <a:ext cx="0" cy="0"/>
+          <a:chOff x="0" y="0"/>
+          <a:chExt cx="0" cy="0"/>
+        </a:xfrm>
+      </p:grpSpPr>
+      <p:sp>
+        <p:nvSpPr>
+          <p:cNvPr id="2" name="Title 1">
+            <a:extLst>
+              <a:ext uri="{FF2B5EF4-FFF2-40B4-BE49-F238E27FC236}">
+                <a16:creationId xmlns:a16="http://schemas.microsoft.com/office/drawing/2014/main" id="{270061DC-FBFD-4DB2-8810-9F8C0F8B687F}"/>
+              </a:ext>
+            </a:extLst>
+          </p:cNvPr>
+          <p:cNvSpPr>
+            <a:spLocks noGrp="1"/>
+          </p:cNvSpPr>
+          <p:nvPr>
+            <p:ph type="title"/>
+          </p:nvPr>
+        </p:nvSpPr>
+        <p:spPr>
+          <a:xfrm>
+            <a:off x="691078" y="722903"/>
+            <a:ext cx="10501177" cy="1918697"/>
+          </a:xfrm>
+        </p:spPr>
+        <p:txBody>
+          <a:bodyPr>
+            <a:normAutofit/>
+          </a:bodyPr>
+          <a:lstStyle/>
+          <a:p>
+            <a:r>
+              <a:rPr lang="en-US" dirty="0">
+                <a:solidFill>
+                  <a:schemeClr val="bg1">
+                    <a:lumMod val="50000"/>
+                  </a:schemeClr>
+                </a:solidFill>
+              </a:rPr>
+              <a:t>Routing</a:t>
+            </a:r>
+            <a:br>
+              <a:rPr lang="en-US" dirty="0">
+                <a:solidFill>
+                  <a:schemeClr val="bg1">
+                    <a:lumMod val="50000"/>
+                  </a:schemeClr>
+                </a:solidFill>
+              </a:rPr>
+            </a:br>
+            <a:r>
+              <a:rPr lang="en-US" dirty="0">
+                <a:solidFill>
+                  <a:schemeClr val="bg1">
+                    <a:lumMod val="50000"/>
+                  </a:schemeClr>
+                </a:solidFill>
+              </a:rPr>
+              <a:t>(Back)</a:t>
+            </a:r>
+            <a:endParaRPr lang="en-US" dirty="0"/>
+          </a:p>
+        </p:txBody>
+      </p:sp>
+      <p:pic>
+        <p:nvPicPr>
+          <p:cNvPr id="3" name="Picture 2" descr="Chart&#10;&#10;Description automatically generated">
+            <a:extLst>
+              <a:ext uri="{FF2B5EF4-FFF2-40B4-BE49-F238E27FC236}">
+                <a16:creationId xmlns:a16="http://schemas.microsoft.com/office/drawing/2014/main" id="{EC154A38-8C8A-44D5-BF3B-854DF69F1237}"/>
+              </a:ext>
+            </a:extLst>
+          </p:cNvPr>
+          <p:cNvPicPr>
+            <a:picLocks noChangeAspect="1"/>
+          </p:cNvPicPr>
+          <p:nvPr/>
+        </p:nvPicPr>
+        <p:blipFill>
+          <a:blip r:embed="rId2">
+            <a:extLst>
+              <a:ext uri="{28A0092B-C50C-407E-A947-70E740481C1C}">
+                <a14:useLocalDpi xmlns:a14="http://schemas.microsoft.com/office/drawing/2010/main" val="0"/>
+              </a:ext>
+            </a:extLst>
+          </a:blip>
+          <a:stretch>
+            <a:fillRect/>
+          </a:stretch>
+        </p:blipFill>
+        <p:spPr>
+          <a:xfrm>
+            <a:off x="3069021" y="185624"/>
+            <a:ext cx="9548735" cy="6365823"/>
+          </a:xfrm>
+          <a:prstGeom prst="rect">
+            <a:avLst/>
+          </a:prstGeom>
+        </p:spPr>
+      </p:pic>
+    </p:spTree>
+    <p:extLst>
+      <p:ext uri="{BB962C8B-B14F-4D97-AF65-F5344CB8AC3E}">
+        <p14:creationId xmlns:p14="http://schemas.microsoft.com/office/powerpoint/2010/main" val="1674516786"/>
       </p:ext>
     </p:extLst>
   </p:cSld>
